--- a/Reporte 201026.pptx
+++ b/Reporte 201026.pptx
@@ -6574,10 +6574,10 @@
       </p:sp>
       <p:pic>
         <p:nvPicPr>
-          <p:cNvPr id="4" name="Imagen 3">
+          <p:cNvPr id="6" name="Imagen 5">
             <a:extLst>
               <a:ext uri="{FF2B5EF4-FFF2-40B4-BE49-F238E27FC236}">
-                <a16:creationId xmlns:a16="http://schemas.microsoft.com/office/drawing/2014/main" id="{D02D394B-757E-7B50-3BFF-7AD80DC35978}"/>
+                <a16:creationId xmlns:a16="http://schemas.microsoft.com/office/drawing/2014/main" id="{40EADD2D-C076-1BE6-D96C-7FB5A679F1C1}"/>
               </a:ext>
             </a:extLst>
           </p:cNvPr>
@@ -6594,8 +6594,8 @@
         </p:blipFill>
         <p:spPr>
           <a:xfrm>
-            <a:off x="0" y="943928"/>
-            <a:ext cx="9144000" cy="3398520"/>
+            <a:off x="0" y="881036"/>
+            <a:ext cx="9144000" cy="3524303"/>
           </a:xfrm>
           <a:prstGeom prst="rect">
             <a:avLst/>
@@ -6680,10 +6680,10 @@
       </p:sp>
       <p:pic>
         <p:nvPicPr>
-          <p:cNvPr id="3" name="Imagen 2">
+          <p:cNvPr id="4" name="Imagen 3">
             <a:extLst>
               <a:ext uri="{FF2B5EF4-FFF2-40B4-BE49-F238E27FC236}">
-                <a16:creationId xmlns:a16="http://schemas.microsoft.com/office/drawing/2014/main" id="{1BA63A79-634E-2134-21A9-4DCE88FDEA88}"/>
+                <a16:creationId xmlns:a16="http://schemas.microsoft.com/office/drawing/2014/main" id="{D3EAE4BA-BA48-6E28-0ECC-1A9FE3BA7204}"/>
               </a:ext>
             </a:extLst>
           </p:cNvPr>
@@ -6700,8 +6700,8 @@
         </p:blipFill>
         <p:spPr>
           <a:xfrm>
-            <a:off x="0" y="1308316"/>
-            <a:ext cx="9144000" cy="2669744"/>
+            <a:off x="0" y="1293547"/>
+            <a:ext cx="9144000" cy="2699281"/>
           </a:xfrm>
           <a:prstGeom prst="rect">
             <a:avLst/>
@@ -6786,10 +6786,10 @@
       </p:sp>
       <p:pic>
         <p:nvPicPr>
-          <p:cNvPr id="4" name="Imagen 3">
+          <p:cNvPr id="5" name="Imagen 4">
             <a:extLst>
               <a:ext uri="{FF2B5EF4-FFF2-40B4-BE49-F238E27FC236}">
-                <a16:creationId xmlns:a16="http://schemas.microsoft.com/office/drawing/2014/main" id="{7D12DDF7-F886-F08D-D5E8-014EE3CA5EAE}"/>
+                <a16:creationId xmlns:a16="http://schemas.microsoft.com/office/drawing/2014/main" id="{C0013126-FA36-601A-007A-6F1DAB13F94D}"/>
               </a:ext>
             </a:extLst>
           </p:cNvPr>
@@ -6806,8 +6806,8 @@
         </p:blipFill>
         <p:spPr>
           <a:xfrm>
-            <a:off x="0" y="736306"/>
-            <a:ext cx="9144000" cy="3813764"/>
+            <a:off x="0" y="749347"/>
+            <a:ext cx="9144000" cy="3787682"/>
           </a:xfrm>
           <a:prstGeom prst="rect">
             <a:avLst/>
@@ -6892,10 +6892,10 @@
       </p:sp>
       <p:pic>
         <p:nvPicPr>
-          <p:cNvPr id="3" name="Imagen 2">
+          <p:cNvPr id="4" name="Imagen 3">
             <a:extLst>
               <a:ext uri="{FF2B5EF4-FFF2-40B4-BE49-F238E27FC236}">
-                <a16:creationId xmlns:a16="http://schemas.microsoft.com/office/drawing/2014/main" id="{2F067AF5-2841-B53E-36AE-C836F31B00D3}"/>
+                <a16:creationId xmlns:a16="http://schemas.microsoft.com/office/drawing/2014/main" id="{05136F35-4EBE-D734-ED43-6912065BF530}"/>
               </a:ext>
             </a:extLst>
           </p:cNvPr>
@@ -6912,8 +6912,8 @@
         </p:blipFill>
         <p:spPr>
           <a:xfrm>
-            <a:off x="0" y="1227808"/>
-            <a:ext cx="9144000" cy="2830760"/>
+            <a:off x="0" y="1244311"/>
+            <a:ext cx="9144000" cy="2797754"/>
           </a:xfrm>
           <a:prstGeom prst="rect">
             <a:avLst/>
@@ -7004,10 +7004,10 @@
       </p:sp>
       <p:pic>
         <p:nvPicPr>
-          <p:cNvPr id="4" name="Imagen 3">
+          <p:cNvPr id="3" name="Imagen 2">
             <a:extLst>
               <a:ext uri="{FF2B5EF4-FFF2-40B4-BE49-F238E27FC236}">
-                <a16:creationId xmlns:a16="http://schemas.microsoft.com/office/drawing/2014/main" id="{59052C75-45C7-F2B2-471A-EA7F89BA8692}"/>
+                <a16:creationId xmlns:a16="http://schemas.microsoft.com/office/drawing/2014/main" id="{4D4937C8-1E0D-EC89-4E3A-AFC585918B5C}"/>
               </a:ext>
             </a:extLst>
           </p:cNvPr>
@@ -7024,8 +7024,8 @@
         </p:blipFill>
         <p:spPr>
           <a:xfrm>
-            <a:off x="-6725" y="1580575"/>
-            <a:ext cx="9144000" cy="2125226"/>
+            <a:off x="0" y="750901"/>
+            <a:ext cx="9144000" cy="3784573"/>
           </a:xfrm>
           <a:prstGeom prst="rect">
             <a:avLst/>
@@ -7116,10 +7116,10 @@
       </p:sp>
       <p:pic>
         <p:nvPicPr>
-          <p:cNvPr id="4" name="Imagen 3">
+          <p:cNvPr id="3" name="Imagen 2">
             <a:extLst>
               <a:ext uri="{FF2B5EF4-FFF2-40B4-BE49-F238E27FC236}">
-                <a16:creationId xmlns:a16="http://schemas.microsoft.com/office/drawing/2014/main" id="{DC481D56-6AE3-6B79-3F51-18E8568BB002}"/>
+                <a16:creationId xmlns:a16="http://schemas.microsoft.com/office/drawing/2014/main" id="{E8281C81-04DC-3C59-5B11-949D7B25B53A}"/>
               </a:ext>
             </a:extLst>
           </p:cNvPr>
@@ -7136,8 +7136,8 @@
         </p:blipFill>
         <p:spPr>
           <a:xfrm>
-            <a:off x="1824036" y="395912"/>
-            <a:ext cx="5495925" cy="4638675"/>
+            <a:off x="1117841" y="364105"/>
+            <a:ext cx="6835293" cy="4779395"/>
           </a:xfrm>
           <a:prstGeom prst="rect">
             <a:avLst/>
